--- a/decks/englit-inspector/englit-inspector_ch1_two-dates.pptx
+++ b/decks/englit-inspector/englit-inspector_ch1_two-dates.pptx
@@ -130,30 +130,30 @@
   <p:extLst>
     <p:ext uri="{521415D9-36F7-43E2-AB2F-B90AF26B5E84}">
       <p14:sectionLst xmlns:p14="http://schemas.microsoft.com/office/powerpoint/2010/main">
-        <p14:section name="Opening" id="{50014cd0-e08a-c8f8-4982-c144d3ce0458}">
+        <p14:section name="Opening" id="{1cf9d6e1-685f-e33f-3f5f-18e21779e206}">
           <p14:sldIdLst>
             <p14:sldId id="256"/>
           </p14:sldIdLst>
         </p14:section>
-        <p14:section name="Gate" id="{ee501c50-6230-2a3d-0fe7-55d431131d8b}">
+        <p14:section name="Gate" id="{7e09176d-c843-068a-0ef8-dade77307a9f}">
           <p14:sldIdLst>
             <p14:sldId id="257"/>
             <p14:sldId id="258"/>
           </p14:sldIdLst>
         </p14:section>
-        <p14:section name="Pre-teach" id="{327bc41f-197e-e5d2-3db8-a3b65bb36276}">
+        <p14:section name="Pre-teach" id="{58e77607-3bc1-224d-45ff-359c8419658f}">
           <p14:sldIdLst>
             <p14:sldId id="259"/>
             <p14:sldId id="260"/>
           </p14:sldIdLst>
         </p14:section>
-        <p14:section name="Read-along" id="{9698a8ed-cfae-4a0f-2456-c3cce8ea81fb}">
+        <p14:section name="Read-along" id="{ea451e29-a9e8-97de-9bfe-e2bd2b554724}">
           <p14:sldIdLst>
             <p14:sldId id="261"/>
             <p14:sldId id="262"/>
           </p14:sldIdLst>
         </p14:section>
-        <p14:section name="Teach" id="{822e91f9-e0e4-492e-2b0c-8c7aa6d02af3}">
+        <p14:section name="Teach" id="{09e150f7-8650-2a9a-5916-c66f98501227}">
           <p14:sldIdLst>
             <p14:sldId id="263"/>
             <p14:sldId id="264"/>
@@ -161,7 +161,7 @@
             <p14:sldId id="266"/>
           </p14:sldIdLst>
         </p14:section>
-        <p14:section name="Routes" id="{1f030689-ad34-9f9e-2c1d-76482c609223}">
+        <p14:section name="Routes" id="{9c4da9fe-762b-1c13-c82c-45492a1809ff}">
           <p14:sldIdLst>
             <p14:sldId id="267"/>
             <p14:sldId id="268"/>
@@ -172,12 +172,12 @@
             <p14:sldId id="273"/>
           </p14:sldIdLst>
         </p14:section>
-        <p14:section name="Close" id="{76d50359-9c05-277a-46c4-022042950d49}">
+        <p14:section name="Close" id="{cb09f7e3-13e8-2a46-1180-1ebabe37ab96}">
           <p14:sldIdLst>
             <p14:sldId id="274"/>
           </p14:sldIdLst>
         </p14:section>
-        <p14:section name="Answers" id="{a11d8e99-0f74-01c4-a645-77552912cb4b}">
+        <p14:section name="Answers" id="{430bb872-9ae5-2e52-b5ae-dc499ae36fc4}">
           <p14:sldIdLst>
             <p14:sldId id="275"/>
             <p14:sldId id="276"/>
@@ -1524,7 +1524,7 @@
               <a:rPr lang="en-US" dirty="0"/>
               <a:t>Exit ticket — individual, silent, on a slip or mini-whiteboard. Recall before help: no notes, no lanes, no hints. Collect before pupils leave.
 Question: In which year is An Inspector Calls set?
-Answer: D   1912. The play is set on a spring evening in 1912, the year the Titanic sank and two years before the First World War. It was written in 1945.
+Answer: A   1912. The play is set on a spring evening in 1912, the year the Titanic sank and two years before the First World War. It was written in 1945.
 Source of this question: gate item 1 re-asked (options rotated) — this chapter has no third quick-check module.
 The ebook also holds task 3, "The story in seven steps", for homework or the next lesson's do now.
 Sort the slips: correct → ready to move on; incorrect → start next lesson in the pre-teach group, with the read-along and the Support lane. Same destination next time.</a:t>
@@ -1616,7 +1616,7 @@
             <a:r>
               <a:rPr lang="en-US" dirty="0"/>
               <a:t>Do now — retrieval. Silent, no notes, no help: recall comes before any support. Give about four minutes.
-1. In which year is An Inspector Calls set?  →  A   1912
+1. In which year is An Inspector Calls set?  →  B   1912
 2. The play is set in 1912 and was written in 1945. How many years separate the two dates?  →  33 years
 3. A system in which businesses are owned privately and run for profit, with each person looking after their own interests, is called ___.  →  capitalism
 Circulate: who gets 3/3 (Stretch route), 2/3 (Core), 0–1 (Support)? Use this to route pupils later in the lesson.</a:t>
@@ -2076,7 +2076,7 @@
             <a:r>
               <a:rPr lang="en-US" dirty="0"/>
               <a:t>Answers — exit ticket: Exit ticket. Reveal the answer; pupils mark their own work in a different colour, then read the "why" together. Same destination for every lane, so one answer serves the whole class.
-Answer: D   1912
+Answer: A   1912
 Why: The play is set on a spring evening in 1912, the year the Titanic sank and two years before the First World War. It was written in 1945.
 Ask a Support pupil to explain one step, and a Stretch pupil to share their extension.</a:t>
             </a:r>
@@ -2167,7 +2167,7 @@
             <a:r>
               <a:rPr lang="en-US" dirty="0"/>
               <a:t>Answers — pupils mark their own in a different colour, then hands up for 3/3, 2/3, 1/3.
-1. A   1912. The play is set on a spring evening in 1912, the year the Titanic sank and two years before the First World War. It was written in 1945.
+1. B   1912. The play is set on a spring evening in 1912, the year the Titanic sank and two years before the First World War. It was written in 1945.
 2. 33 years. 1945 minus 1912 is 33. Those 33 years hold two world wars, the Russian Revolution, the General Strike and the Depression, and the audience knew all of it.
 3. capitalism. Capitalism is Mr Birling's creed: profit first, and every man for himself. Socialism, the Inspector's creed, is the opposite.
 Say the route each score points to: 3/3 Stretch, 2/3 Core, 0–1 Support. Pupils may choose to move up.</a:t>
@@ -10921,7 +10921,7 @@
                 <a:ea typeface="Calibri" pitchFamily="34" charset="-122"/>
                 <a:cs typeface="Calibri" pitchFamily="34" charset="-120"/>
               </a:rPr>
-              <a:t>1945</a:t>
+              <a:t>1912</a:t>
             </a:r>
             <a:endParaRPr lang="en-US" sz="2400" dirty="0"/>
           </a:p>
@@ -10995,7 +10995,7 @@
                 <a:ea typeface="Calibri" pitchFamily="34" charset="-122"/>
                 <a:cs typeface="Calibri" pitchFamily="34" charset="-120"/>
               </a:rPr>
-              <a:t>1926</a:t>
+              <a:t>1945</a:t>
             </a:r>
             <a:endParaRPr lang="en-US" sz="2400" dirty="0"/>
           </a:p>
@@ -11032,7 +11032,7 @@
                 <a:ea typeface="Calibri" pitchFamily="34" charset="-122"/>
                 <a:cs typeface="Calibri" pitchFamily="34" charset="-120"/>
               </a:rPr>
-              <a:t>1912</a:t>
+              <a:t>1926</a:t>
             </a:r>
             <a:endParaRPr lang="en-US" sz="2400" dirty="0"/>
           </a:p>
@@ -11512,7 +11512,7 @@
                 <a:ea typeface="Calibri" pitchFamily="34" charset="-122"/>
                 <a:cs typeface="Calibri" pitchFamily="34" charset="-120"/>
               </a:rPr>
-              <a:t>1912</a:t>
+              <a:t>1926</a:t>
             </a:r>
             <a:endParaRPr lang="en-US" sz="2400" dirty="0"/>
           </a:p>
@@ -11549,7 +11549,7 @@
                 <a:ea typeface="Calibri" pitchFamily="34" charset="-122"/>
                 <a:cs typeface="Calibri" pitchFamily="34" charset="-120"/>
               </a:rPr>
-              <a:t>1945</a:t>
+              <a:t>1912</a:t>
             </a:r>
             <a:endParaRPr lang="en-US" sz="2400" dirty="0"/>
           </a:p>
@@ -11623,7 +11623,7 @@
                 <a:ea typeface="Calibri" pitchFamily="34" charset="-122"/>
                 <a:cs typeface="Calibri" pitchFamily="34" charset="-120"/>
               </a:rPr>
-              <a:t>1926</a:t>
+              <a:t>1945</a:t>
             </a:r>
             <a:endParaRPr lang="en-US" sz="2400" dirty="0"/>
           </a:p>
@@ -14087,7 +14087,7 @@
                 <a:ea typeface="Cambria" pitchFamily="34" charset="-122"/>
                 <a:cs typeface="Cambria" pitchFamily="34" charset="-120"/>
               </a:rPr>
-              <a:t>D   1912</a:t>
+              <a:t>A   1912</a:t>
             </a:r>
             <a:endParaRPr lang="en-US" sz="1800" dirty="0"/>
           </a:p>
@@ -14608,7 +14608,7 @@
                 <a:ea typeface="Calibri" pitchFamily="34" charset="-122"/>
                 <a:cs typeface="Calibri" pitchFamily="34" charset="-120"/>
               </a:rPr>
-              <a:t>A   1912</a:t>
+              <a:t>B   1912</a:t>
             </a:r>
             <a:endParaRPr lang="en-US" sz="2200" dirty="0"/>
           </a:p>

--- a/decks/englit-inspector/englit-inspector_ch1_two-dates.pptx
+++ b/decks/englit-inspector/englit-inspector_ch1_two-dates.pptx
@@ -130,30 +130,30 @@
   <p:extLst>
     <p:ext uri="{521415D9-36F7-43E2-AB2F-B90AF26B5E84}">
       <p14:sectionLst xmlns:p14="http://schemas.microsoft.com/office/powerpoint/2010/main">
-        <p14:section name="Opening" id="{1cf9d6e1-685f-e33f-3f5f-18e21779e206}">
+        <p14:section name="Opening" id="{453e1617-f32a-9a8f-bdd1-b89adb7acec1}">
           <p14:sldIdLst>
             <p14:sldId id="256"/>
           </p14:sldIdLst>
         </p14:section>
-        <p14:section name="Gate" id="{7e09176d-c843-068a-0ef8-dade77307a9f}">
+        <p14:section name="Gate" id="{91ed5a43-6ee9-e778-9999-63c98301eb20}">
           <p14:sldIdLst>
             <p14:sldId id="257"/>
             <p14:sldId id="258"/>
           </p14:sldIdLst>
         </p14:section>
-        <p14:section name="Pre-teach" id="{58e77607-3bc1-224d-45ff-359c8419658f}">
+        <p14:section name="Pre-teach" id="{4b6c2fe8-780a-b77d-186c-e347b56e27a9}">
           <p14:sldIdLst>
             <p14:sldId id="259"/>
             <p14:sldId id="260"/>
           </p14:sldIdLst>
         </p14:section>
-        <p14:section name="Read-along" id="{ea451e29-a9e8-97de-9bfe-e2bd2b554724}">
+        <p14:section name="Read-along" id="{34873299-e48b-5cb2-7f41-96665ded5594}">
           <p14:sldIdLst>
             <p14:sldId id="261"/>
             <p14:sldId id="262"/>
           </p14:sldIdLst>
         </p14:section>
-        <p14:section name="Teach" id="{09e150f7-8650-2a9a-5916-c66f98501227}">
+        <p14:section name="Teach" id="{c5bf29b2-af11-e5b9-1614-2753f0e1fdac}">
           <p14:sldIdLst>
             <p14:sldId id="263"/>
             <p14:sldId id="264"/>
@@ -161,7 +161,7 @@
             <p14:sldId id="266"/>
           </p14:sldIdLst>
         </p14:section>
-        <p14:section name="Routes" id="{9c4da9fe-762b-1c13-c82c-45492a1809ff}">
+        <p14:section name="Routes" id="{88c3522c-1df7-5703-c80d-d2ff3e3ee8f6}">
           <p14:sldIdLst>
             <p14:sldId id="267"/>
             <p14:sldId id="268"/>
@@ -172,12 +172,12 @@
             <p14:sldId id="273"/>
           </p14:sldIdLst>
         </p14:section>
-        <p14:section name="Close" id="{cb09f7e3-13e8-2a46-1180-1ebabe37ab96}">
+        <p14:section name="Close" id="{3434e894-96ed-b29f-1578-377e257d30ed}">
           <p14:sldIdLst>
             <p14:sldId id="274"/>
           </p14:sldIdLst>
         </p14:section>
-        <p14:section name="Answers" id="{430bb872-9ae5-2e52-b5ae-dc499ae36fc4}">
+        <p14:section name="Answers" id="{c6ba0724-f4d1-9c39-c878-3042bca557ec}">
           <p14:sldIdLst>
             <p14:sldId id="275"/>
             <p14:sldId id="276"/>
